--- a/dist/weeks-1학기/서비스디자인_1학기_03주차_필드리서치.pptx
+++ b/dist/weeks-1학기/서비스디자인_1학기_03주차_필드리서치.pptx
@@ -4838,7 +4838,7 @@
               <a:buNone/>
             </a:pPr>
             <a:r>
-              <a:rPr lang="en-US" sz="1150" dirty="0">
+              <a:rPr lang="en-US" sz="1050" dirty="0">
                 <a:solidFill>
                   <a:srgbClr val="6E6E6E"/>
                 </a:solidFill>
@@ -4848,7 +4848,7 @@
               </a:rPr>
               <a:t>무슨 일이 일어나는가. 사람들이 달성하려는 목표와 그것을 위한 일련의 행동.</a:t>
             </a:r>
-            <a:endParaRPr lang="en-US" sz="1150" dirty="0"/>
+            <a:endParaRPr lang="en-US" sz="1050" dirty="0"/>
           </a:p>
         </p:txBody>
       </p:sp>
@@ -5011,7 +5011,7 @@
               <a:buNone/>
             </a:pPr>
             <a:r>
-              <a:rPr lang="en-US" sz="1150" dirty="0">
+              <a:rPr lang="en-US" sz="1050" dirty="0">
                 <a:solidFill>
                   <a:srgbClr val="6E6E6E"/>
                 </a:solidFill>
@@ -5021,7 +5021,7 @@
               </a:rPr>
               <a:t>그 일이 벌어지는 공간의 성격. 조명, 소음, 동선, 대기 공간, 표지판.</a:t>
             </a:r>
-            <a:endParaRPr lang="en-US" sz="1150" dirty="0"/>
+            <a:endParaRPr lang="en-US" sz="1050" dirty="0"/>
           </a:p>
         </p:txBody>
       </p:sp>
@@ -5184,7 +5184,7 @@
               <a:buNone/>
             </a:pPr>
             <a:r>
-              <a:rPr lang="en-US" sz="1150" dirty="0">
+              <a:rPr lang="en-US" sz="1050" dirty="0">
                 <a:solidFill>
                   <a:srgbClr val="6E6E6E"/>
                 </a:solidFill>
@@ -5194,7 +5194,7 @@
               </a:rPr>
               <a:t>사람과 사람, 사람과 사물 사이에 오가는 것. 말, 대기표, 결제, 눈짓.</a:t>
             </a:r>
-            <a:endParaRPr lang="en-US" sz="1150" dirty="0"/>
+            <a:endParaRPr lang="en-US" sz="1050" dirty="0"/>
           </a:p>
         </p:txBody>
       </p:sp>
@@ -5357,7 +5357,7 @@
               <a:buNone/>
             </a:pPr>
             <a:r>
-              <a:rPr lang="en-US" sz="1150" dirty="0">
+              <a:rPr lang="en-US" sz="1050" dirty="0">
                 <a:solidFill>
                   <a:srgbClr val="6E6E6E"/>
                 </a:solidFill>
@@ -5367,7 +5367,7 @@
               </a:rPr>
               <a:t>쓰이는 물건과 그것을 쓰는 사람. 누가 무엇을 어떻게 손에 쥐는가.</a:t>
             </a:r>
-            <a:endParaRPr lang="en-US" sz="1150" dirty="0"/>
+            <a:endParaRPr lang="en-US" sz="1050" dirty="0"/>
           </a:p>
         </p:txBody>
       </p:sp>
@@ -16275,7 +16275,7 @@
               <a:buNone/>
             </a:pPr>
             <a:r>
-              <a:rPr lang="en-US" sz="1150" dirty="0">
+              <a:rPr lang="en-US" sz="1050" dirty="0">
                 <a:solidFill>
                   <a:srgbClr val="6E6E6E"/>
                 </a:solidFill>
@@ -16285,7 +16285,7 @@
               </a:rPr>
               <a:t>실제로 무엇을 했는가.</a:t>
             </a:r>
-            <a:endParaRPr lang="en-US" sz="1150" dirty="0"/>
+            <a:endParaRPr lang="en-US" sz="1050" dirty="0"/>
           </a:p>
           <a:p>
             <a:pPr indent="0" marL="0">
@@ -16295,7 +16295,7 @@
               <a:buNone/>
             </a:pPr>
             <a:r>
-              <a:rPr lang="en-US" sz="1150" dirty="0">
+              <a:rPr lang="en-US" sz="1050" dirty="0">
                 <a:solidFill>
                   <a:srgbClr val="6E6E6E"/>
                 </a:solidFill>
@@ -16305,7 +16305,7 @@
               </a:rPr>
               <a:t>"어제 택배를 어떻게 받으셨어요?"</a:t>
             </a:r>
-            <a:endParaRPr lang="en-US" sz="1150" dirty="0"/>
+            <a:endParaRPr lang="en-US" sz="1050" dirty="0"/>
           </a:p>
           <a:p>
             <a:pPr indent="0" marL="0">
@@ -16315,7 +16315,7 @@
               <a:buNone/>
             </a:pPr>
             <a:r>
-              <a:rPr lang="en-US" sz="1150" dirty="0">
+              <a:rPr lang="en-US" sz="1050" dirty="0">
                 <a:solidFill>
                   <a:srgbClr val="6E6E6E"/>
                 </a:solidFill>
@@ -16325,7 +16325,7 @@
               </a:rPr>
               <a:t>가장 신뢰할 수 있는 답이 나옵니다. 인터뷰의 뼈대로 삼으세요.</a:t>
             </a:r>
-            <a:endParaRPr lang="en-US" sz="1150" dirty="0"/>
+            <a:endParaRPr lang="en-US" sz="1050" dirty="0"/>
           </a:p>
         </p:txBody>
       </p:sp>
@@ -16488,7 +16488,7 @@
               <a:buNone/>
             </a:pPr>
             <a:r>
-              <a:rPr lang="en-US" sz="1150" dirty="0">
+              <a:rPr lang="en-US" sz="1050" dirty="0">
                 <a:solidFill>
                   <a:srgbClr val="6E6E6E"/>
                 </a:solidFill>
@@ -16498,7 +16498,7 @@
               </a:rPr>
               <a:t>구체적인 한 번의 일.</a:t>
             </a:r>
-            <a:endParaRPr lang="en-US" sz="1150" dirty="0"/>
+            <a:endParaRPr lang="en-US" sz="1050" dirty="0"/>
           </a:p>
           <a:p>
             <a:pPr indent="0" marL="0">
@@ -16508,7 +16508,7 @@
               <a:buNone/>
             </a:pPr>
             <a:r>
-              <a:rPr lang="en-US" sz="1150" dirty="0">
+              <a:rPr lang="en-US" sz="1050" dirty="0">
                 <a:solidFill>
                   <a:srgbClr val="6E6E6E"/>
                 </a:solidFill>
@@ -16518,7 +16518,7 @@
               </a:rPr>
               <a:t>"가장 최근에 곤란했던 때가 언제였나요?"</a:t>
             </a:r>
-            <a:endParaRPr lang="en-US" sz="1150" dirty="0"/>
+            <a:endParaRPr lang="en-US" sz="1050" dirty="0"/>
           </a:p>
           <a:p>
             <a:pPr indent="0" marL="0">
@@ -16528,7 +16528,7 @@
               <a:buNone/>
             </a:pPr>
             <a:r>
-              <a:rPr lang="en-US" sz="1150" dirty="0">
+              <a:rPr lang="en-US" sz="1050" dirty="0">
                 <a:solidFill>
                   <a:srgbClr val="6E6E6E"/>
                 </a:solidFill>
@@ -16538,7 +16538,7 @@
               </a:rPr>
               <a:t>일반론을 막고 이야기를 끌어냅니다.</a:t>
             </a:r>
-            <a:endParaRPr lang="en-US" sz="1150" dirty="0"/>
+            <a:endParaRPr lang="en-US" sz="1050" dirty="0"/>
           </a:p>
         </p:txBody>
       </p:sp>
@@ -16701,7 +16701,7 @@
               <a:buNone/>
             </a:pPr>
             <a:r>
-              <a:rPr lang="en-US" sz="1150" dirty="0">
+              <a:rPr lang="en-US" sz="1050" dirty="0">
                 <a:solidFill>
                   <a:srgbClr val="6E6E6E"/>
                 </a:solidFill>
@@ -16711,7 +16711,7 @@
               </a:rPr>
               <a:t>그때의 조건.</a:t>
             </a:r>
-            <a:endParaRPr lang="en-US" sz="1150" dirty="0"/>
+            <a:endParaRPr lang="en-US" sz="1050" dirty="0"/>
           </a:p>
           <a:p>
             <a:pPr indent="0" marL="0">
@@ -16721,7 +16721,7 @@
               <a:buNone/>
             </a:pPr>
             <a:r>
-              <a:rPr lang="en-US" sz="1150" dirty="0">
+              <a:rPr lang="en-US" sz="1050" dirty="0">
                 <a:solidFill>
                   <a:srgbClr val="6E6E6E"/>
                 </a:solidFill>
@@ -16731,7 +16731,7 @@
               </a:rPr>
               <a:t>"그때 어디 계셨어요? 몇 시였죠?"</a:t>
             </a:r>
-            <a:endParaRPr lang="en-US" sz="1150" dirty="0"/>
+            <a:endParaRPr lang="en-US" sz="1050" dirty="0"/>
           </a:p>
           <a:p>
             <a:pPr indent="0" marL="0">
@@ -16741,7 +16741,7 @@
               <a:buNone/>
             </a:pPr>
             <a:r>
-              <a:rPr lang="en-US" sz="1150" dirty="0">
+              <a:rPr lang="en-US" sz="1050" dirty="0">
                 <a:solidFill>
                   <a:srgbClr val="6E6E6E"/>
                 </a:solidFill>
@@ -16751,7 +16751,7 @@
               </a:rPr>
               <a:t>환경 · 시간 · 동행자가 행동의 진짜 원인인 경우가 많습니다.</a:t>
             </a:r>
-            <a:endParaRPr lang="en-US" sz="1150" dirty="0"/>
+            <a:endParaRPr lang="en-US" sz="1050" dirty="0"/>
           </a:p>
         </p:txBody>
       </p:sp>
@@ -16914,7 +16914,7 @@
               <a:buNone/>
             </a:pPr>
             <a:r>
-              <a:rPr lang="en-US" sz="1150" dirty="0">
+              <a:rPr lang="en-US" sz="1050" dirty="0">
                 <a:solidFill>
                   <a:srgbClr val="6E6E6E"/>
                 </a:solidFill>
@@ -16924,7 +16924,7 @@
               </a:rPr>
               <a:t>그때 어떤 기분이었는가.</a:t>
             </a:r>
-            <a:endParaRPr lang="en-US" sz="1150" dirty="0"/>
+            <a:endParaRPr lang="en-US" sz="1050" dirty="0"/>
           </a:p>
           <a:p>
             <a:pPr indent="0" marL="0">
@@ -16934,7 +16934,7 @@
               <a:buNone/>
             </a:pPr>
             <a:r>
-              <a:rPr lang="en-US" sz="1150" dirty="0">
+              <a:rPr lang="en-US" sz="1050" dirty="0">
                 <a:solidFill>
                   <a:srgbClr val="6E6E6E"/>
                 </a:solidFill>
@@ -16944,7 +16944,7 @@
               </a:rPr>
               <a:t>"그 순간 어떤 생각이 드셨어요?"</a:t>
             </a:r>
-            <a:endParaRPr lang="en-US" sz="1150" dirty="0"/>
+            <a:endParaRPr lang="en-US" sz="1050" dirty="0"/>
           </a:p>
           <a:p>
             <a:pPr indent="0" marL="0">
@@ -16954,7 +16954,7 @@
               <a:buNone/>
             </a:pPr>
             <a:r>
-              <a:rPr lang="en-US" sz="1150" dirty="0">
+              <a:rPr lang="en-US" sz="1050" dirty="0">
                 <a:solidFill>
                   <a:srgbClr val="6E6E6E"/>
                 </a:solidFill>
@@ -16964,7 +16964,7 @@
               </a:rPr>
               <a:t>불안 · 짜증 · 안도가 어디서 생기는지 표시해 둡니다.</a:t>
             </a:r>
-            <a:endParaRPr lang="en-US" sz="1150" dirty="0"/>
+            <a:endParaRPr lang="en-US" sz="1050" dirty="0"/>
           </a:p>
         </p:txBody>
       </p:sp>

--- a/dist/weeks-1학기/서비스디자인_1학기_03주차_필드리서치.pptx
+++ b/dist/weeks-1학기/서비스디자인_1학기_03주차_필드리서치.pptx
@@ -17414,7 +17414,7 @@
             <a:r>
               <a:rPr lang="en-US" sz="1700" dirty="0">
                 <a:solidFill>
-                  <a:srgbClr val="111111"/>
+                  <a:srgbClr val="9B9B9B"/>
                 </a:solidFill>
                 <a:latin typeface="Pretendard SemiBold" pitchFamily="34" charset="0"/>
                 <a:ea typeface="Pretendard SemiBold" pitchFamily="34" charset="-122"/>
@@ -17442,6 +17442,257 @@
           </a:prstGeom>
           <a:solidFill>
             <a:srgbClr val="FFFFFF"/>
+          </a:solidFill>
+          <a:ln w="12700">
+            <a:solidFill>
+              <a:srgbClr val="111111"/>
+            </a:solidFill>
+            <a:prstDash val="solid"/>
+          </a:ln>
+        </p:spPr>
+      </p:sp>
+      <p:sp>
+        <p:nvSpPr>
+          <p:cNvPr id="12" name="Shape 10"/>
+          <p:cNvSpPr/>
+          <p:nvPr/>
+        </p:nvSpPr>
+        <p:spPr>
+          <a:xfrm>
+            <a:off x="6297016" y="1627632"/>
+            <a:ext cx="5254600" cy="64008"/>
+          </a:xfrm>
+          <a:prstGeom prst="rect">
+            <a:avLst/>
+          </a:prstGeom>
+          <a:solidFill>
+            <a:srgbClr val="111111"/>
+          </a:solidFill>
+          <a:ln w="12700">
+            <a:solidFill>
+              <a:srgbClr val="111111"/>
+            </a:solidFill>
+            <a:prstDash val="solid"/>
+          </a:ln>
+        </p:spPr>
+      </p:sp>
+      <p:sp>
+        <p:nvSpPr>
+          <p:cNvPr id="13" name="Text 11"/>
+          <p:cNvSpPr/>
+          <p:nvPr/>
+        </p:nvSpPr>
+        <p:spPr>
+          <a:xfrm>
+            <a:off x="6699352" y="1901952"/>
+            <a:ext cx="4449928" cy="365760"/>
+          </a:xfrm>
+          <a:prstGeom prst="rect">
+            <a:avLst/>
+          </a:prstGeom>
+          <a:noFill/>
+          <a:ln/>
+        </p:spPr>
+        <p:txBody>
+          <a:bodyPr wrap="square" lIns="0" tIns="0" rIns="0" bIns="0" rtlCol="0" anchor="ctr"/>
+          <a:lstStyle/>
+          <a:p>
+            <a:pPr indent="0" marL="0">
+              <a:buNone/>
+            </a:pPr>
+            <a:r>
+              <a:rPr lang="en-US" sz="1700" dirty="0">
+                <a:solidFill>
+                  <a:srgbClr val="111111"/>
+                </a:solidFill>
+                <a:latin typeface="Pretendard SemiBold" pitchFamily="34" charset="0"/>
+                <a:ea typeface="Pretendard SemiBold" pitchFamily="34" charset="-122"/>
+                <a:cs typeface="Pretendard SemiBold" pitchFamily="34" charset="-120"/>
+              </a:rPr>
+              <a:t>이렇게 쓰면 답이 망가집니다</a:t>
+            </a:r>
+            <a:endParaRPr lang="en-US" sz="1700" dirty="0"/>
+          </a:p>
+        </p:txBody>
+      </p:sp>
+      <p:sp>
+        <p:nvSpPr>
+          <p:cNvPr id="14" name="Text 12"/>
+          <p:cNvSpPr/>
+          <p:nvPr/>
+        </p:nvSpPr>
+        <p:spPr>
+          <a:xfrm>
+            <a:off x="1042416" y="2450592"/>
+            <a:ext cx="2011680" cy="274320"/>
+          </a:xfrm>
+          <a:prstGeom prst="rect">
+            <a:avLst/>
+          </a:prstGeom>
+          <a:noFill/>
+          <a:ln/>
+        </p:spPr>
+        <p:txBody>
+          <a:bodyPr wrap="square" lIns="0" tIns="0" rIns="0" bIns="0" rtlCol="0" anchor="ctr"/>
+          <a:lstStyle/>
+          <a:p>
+            <a:pPr indent="0" marL="0">
+              <a:buNone/>
+            </a:pPr>
+            <a:r>
+              <a:rPr lang="en-US" sz="900" b="1" spc="160" kern="0" dirty="0">
+                <a:solidFill>
+                  <a:srgbClr val="9B9B9B"/>
+                </a:solidFill>
+                <a:latin typeface="Pretendard" pitchFamily="34" charset="0"/>
+                <a:ea typeface="Pretendard" pitchFamily="34" charset="-122"/>
+                <a:cs typeface="Pretendard" pitchFamily="34" charset="-120"/>
+              </a:rPr>
+              <a:t>유도 질문</a:t>
+            </a:r>
+            <a:endParaRPr lang="en-US" sz="900" dirty="0"/>
+          </a:p>
+        </p:txBody>
+      </p:sp>
+      <p:sp>
+        <p:nvSpPr>
+          <p:cNvPr id="15" name="Text 13"/>
+          <p:cNvSpPr/>
+          <p:nvPr/>
+        </p:nvSpPr>
+        <p:spPr>
+          <a:xfrm>
+            <a:off x="1042416" y="2688336"/>
+            <a:ext cx="4449928" cy="384048"/>
+          </a:xfrm>
+          <a:prstGeom prst="rect">
+            <a:avLst/>
+          </a:prstGeom>
+          <a:noFill/>
+          <a:ln/>
+        </p:spPr>
+        <p:txBody>
+          <a:bodyPr wrap="square" lIns="0" tIns="0" rIns="0" bIns="0" rtlCol="0" anchor="t"/>
+          <a:lstStyle/>
+          <a:p>
+            <a:pPr indent="0" marL="0">
+              <a:lnSpc>
+                <a:spcPct val="120000"/>
+              </a:lnSpc>
+              <a:buNone/>
+            </a:pPr>
+            <a:r>
+              <a:rPr lang="en-US" sz="1150" dirty="0">
+                <a:solidFill>
+                  <a:srgbClr val="6E6E6E"/>
+                </a:solidFill>
+                <a:latin typeface="Pretendard" pitchFamily="34" charset="0"/>
+                <a:ea typeface="Pretendard" pitchFamily="34" charset="-122"/>
+                <a:cs typeface="Pretendard" pitchFamily="34" charset="-120"/>
+              </a:rPr>
+              <a:t>"이 서비스를 쓰실 때 어떤 순간이 기억에 남으세요?" — 좋고 나쁨을 정하지 않고 열어 둡니다</a:t>
+            </a:r>
+            <a:endParaRPr lang="en-US" sz="1150" dirty="0"/>
+          </a:p>
+        </p:txBody>
+      </p:sp>
+      <p:sp>
+        <p:nvSpPr>
+          <p:cNvPr id="16" name="Text 14"/>
+          <p:cNvSpPr/>
+          <p:nvPr/>
+        </p:nvSpPr>
+        <p:spPr>
+          <a:xfrm>
+            <a:off x="6699352" y="2450592"/>
+            <a:ext cx="2011680" cy="274320"/>
+          </a:xfrm>
+          <a:prstGeom prst="rect">
+            <a:avLst/>
+          </a:prstGeom>
+          <a:noFill/>
+          <a:ln/>
+        </p:spPr>
+        <p:txBody>
+          <a:bodyPr wrap="square" lIns="0" tIns="0" rIns="0" bIns="0" rtlCol="0" anchor="ctr"/>
+          <a:lstStyle/>
+          <a:p>
+            <a:pPr indent="0" marL="0">
+              <a:buNone/>
+            </a:pPr>
+            <a:r>
+              <a:rPr lang="en-US" sz="900" b="1" spc="160" kern="0" dirty="0">
+                <a:solidFill>
+                  <a:srgbClr val="111111"/>
+                </a:solidFill>
+                <a:latin typeface="Pretendard" pitchFamily="34" charset="0"/>
+                <a:ea typeface="Pretendard" pitchFamily="34" charset="-122"/>
+                <a:cs typeface="Pretendard" pitchFamily="34" charset="-120"/>
+              </a:rPr>
+              <a:t>유도 질문</a:t>
+            </a:r>
+            <a:endParaRPr lang="en-US" sz="900" dirty="0"/>
+          </a:p>
+        </p:txBody>
+      </p:sp>
+      <p:sp>
+        <p:nvSpPr>
+          <p:cNvPr id="17" name="Text 15"/>
+          <p:cNvSpPr/>
+          <p:nvPr/>
+        </p:nvSpPr>
+        <p:spPr>
+          <a:xfrm>
+            <a:off x="6699352" y="2688336"/>
+            <a:ext cx="4449928" cy="384048"/>
+          </a:xfrm>
+          <a:prstGeom prst="rect">
+            <a:avLst/>
+          </a:prstGeom>
+          <a:noFill/>
+          <a:ln/>
+        </p:spPr>
+        <p:txBody>
+          <a:bodyPr wrap="square" lIns="0" tIns="0" rIns="0" bIns="0" rtlCol="0" anchor="t"/>
+          <a:lstStyle/>
+          <a:p>
+            <a:pPr indent="0" marL="0">
+              <a:lnSpc>
+                <a:spcPct val="120000"/>
+              </a:lnSpc>
+              <a:buNone/>
+            </a:pPr>
+            <a:r>
+              <a:rPr lang="en-US" sz="1150" b="1" dirty="0">
+                <a:solidFill>
+                  <a:srgbClr val="1F1F1F"/>
+                </a:solidFill>
+                <a:latin typeface="Pretendard" pitchFamily="34" charset="0"/>
+                <a:ea typeface="Pretendard" pitchFamily="34" charset="-122"/>
+                <a:cs typeface="Pretendard" pitchFamily="34" charset="-120"/>
+              </a:rPr>
+              <a:t>"이 서비스 불편하지 않으세요?" — 답을 미리 정해두고 물으면 상대는 동의해 줍니다</a:t>
+            </a:r>
+            <a:endParaRPr lang="en-US" sz="1150" dirty="0"/>
+          </a:p>
+        </p:txBody>
+      </p:sp>
+      <p:sp>
+        <p:nvSpPr>
+          <p:cNvPr id="18" name="Shape 16"/>
+          <p:cNvSpPr/>
+          <p:nvPr/>
+        </p:nvSpPr>
+        <p:spPr>
+          <a:xfrm>
+            <a:off x="1042416" y="3054096"/>
+            <a:ext cx="4449928" cy="7315"/>
+          </a:xfrm>
+          <a:prstGeom prst="rect">
+            <a:avLst/>
+          </a:prstGeom>
+          <a:solidFill>
+            <a:srgbClr val="DCDCDC"/>
           </a:solidFill>
           <a:ln w="12700">
             <a:solidFill>
@@ -17453,214 +17704,13 @@
       </p:sp>
       <p:sp>
         <p:nvSpPr>
-          <p:cNvPr id="12" name="Text 10"/>
-          <p:cNvSpPr/>
-          <p:nvPr/>
-        </p:nvSpPr>
-        <p:spPr>
-          <a:xfrm>
-            <a:off x="6699352" y="1901952"/>
-            <a:ext cx="4449928" cy="365760"/>
-          </a:xfrm>
-          <a:prstGeom prst="rect">
-            <a:avLst/>
-          </a:prstGeom>
-          <a:noFill/>
-          <a:ln/>
-        </p:spPr>
-        <p:txBody>
-          <a:bodyPr wrap="square" lIns="0" tIns="0" rIns="0" bIns="0" rtlCol="0" anchor="ctr"/>
-          <a:lstStyle/>
-          <a:p>
-            <a:pPr indent="0" marL="0">
-              <a:buNone/>
-            </a:pPr>
-            <a:r>
-              <a:rPr lang="en-US" sz="1700" dirty="0">
-                <a:solidFill>
-                  <a:srgbClr val="9B9B9B"/>
-                </a:solidFill>
-                <a:latin typeface="Pretendard SemiBold" pitchFamily="34" charset="0"/>
-                <a:ea typeface="Pretendard SemiBold" pitchFamily="34" charset="-122"/>
-                <a:cs typeface="Pretendard SemiBold" pitchFamily="34" charset="-120"/>
-              </a:rPr>
-              <a:t>이렇게 쓰면 답이 망가집니다</a:t>
-            </a:r>
-            <a:endParaRPr lang="en-US" sz="1700" dirty="0"/>
-          </a:p>
-        </p:txBody>
-      </p:sp>
-      <p:sp>
-        <p:nvSpPr>
-          <p:cNvPr id="13" name="Text 11"/>
-          <p:cNvSpPr/>
-          <p:nvPr/>
-        </p:nvSpPr>
-        <p:spPr>
-          <a:xfrm>
-            <a:off x="1042416" y="2450592"/>
-            <a:ext cx="2011680" cy="274320"/>
-          </a:xfrm>
-          <a:prstGeom prst="rect">
-            <a:avLst/>
-          </a:prstGeom>
-          <a:noFill/>
-          <a:ln/>
-        </p:spPr>
-        <p:txBody>
-          <a:bodyPr wrap="square" lIns="0" tIns="0" rIns="0" bIns="0" rtlCol="0" anchor="ctr"/>
-          <a:lstStyle/>
-          <a:p>
-            <a:pPr indent="0" marL="0">
-              <a:buNone/>
-            </a:pPr>
-            <a:r>
-              <a:rPr lang="en-US" sz="900" b="1" spc="160" kern="0" dirty="0">
-                <a:solidFill>
-                  <a:srgbClr val="111111"/>
-                </a:solidFill>
-                <a:latin typeface="Pretendard" pitchFamily="34" charset="0"/>
-                <a:ea typeface="Pretendard" pitchFamily="34" charset="-122"/>
-                <a:cs typeface="Pretendard" pitchFamily="34" charset="-120"/>
-              </a:rPr>
-              <a:t>유도 질문</a:t>
-            </a:r>
-            <a:endParaRPr lang="en-US" sz="900" dirty="0"/>
-          </a:p>
-        </p:txBody>
-      </p:sp>
-      <p:sp>
-        <p:nvSpPr>
-          <p:cNvPr id="14" name="Text 12"/>
-          <p:cNvSpPr/>
-          <p:nvPr/>
-        </p:nvSpPr>
-        <p:spPr>
-          <a:xfrm>
-            <a:off x="1042416" y="2688336"/>
-            <a:ext cx="4449928" cy="384048"/>
-          </a:xfrm>
-          <a:prstGeom prst="rect">
-            <a:avLst/>
-          </a:prstGeom>
-          <a:noFill/>
-          <a:ln/>
-        </p:spPr>
-        <p:txBody>
-          <a:bodyPr wrap="square" lIns="0" tIns="0" rIns="0" bIns="0" rtlCol="0" anchor="t"/>
-          <a:lstStyle/>
-          <a:p>
-            <a:pPr indent="0" marL="0">
-              <a:lnSpc>
-                <a:spcPct val="120000"/>
-              </a:lnSpc>
-              <a:buNone/>
-            </a:pPr>
-            <a:r>
-              <a:rPr lang="en-US" sz="1150" dirty="0">
-                <a:solidFill>
-                  <a:srgbClr val="1F1F1F"/>
-                </a:solidFill>
-                <a:latin typeface="Pretendard" pitchFamily="34" charset="0"/>
-                <a:ea typeface="Pretendard" pitchFamily="34" charset="-122"/>
-                <a:cs typeface="Pretendard" pitchFamily="34" charset="-120"/>
-              </a:rPr>
-              <a:t>"이 서비스를 쓰실 때 어떤 순간이 기억에 남으세요?" — 좋고 나쁨을 정하지 않고 열어 둡니다</a:t>
-            </a:r>
-            <a:endParaRPr lang="en-US" sz="1150" dirty="0"/>
-          </a:p>
-        </p:txBody>
-      </p:sp>
-      <p:sp>
-        <p:nvSpPr>
-          <p:cNvPr id="15" name="Text 13"/>
-          <p:cNvSpPr/>
-          <p:nvPr/>
-        </p:nvSpPr>
-        <p:spPr>
-          <a:xfrm>
-            <a:off x="6699352" y="2450592"/>
-            <a:ext cx="2011680" cy="274320"/>
-          </a:xfrm>
-          <a:prstGeom prst="rect">
-            <a:avLst/>
-          </a:prstGeom>
-          <a:noFill/>
-          <a:ln/>
-        </p:spPr>
-        <p:txBody>
-          <a:bodyPr wrap="square" lIns="0" tIns="0" rIns="0" bIns="0" rtlCol="0" anchor="ctr"/>
-          <a:lstStyle/>
-          <a:p>
-            <a:pPr indent="0" marL="0">
-              <a:buNone/>
-            </a:pPr>
-            <a:r>
-              <a:rPr lang="en-US" sz="900" b="1" spc="160" kern="0" dirty="0">
-                <a:solidFill>
-                  <a:srgbClr val="9B9B9B"/>
-                </a:solidFill>
-                <a:latin typeface="Pretendard" pitchFamily="34" charset="0"/>
-                <a:ea typeface="Pretendard" pitchFamily="34" charset="-122"/>
-                <a:cs typeface="Pretendard" pitchFamily="34" charset="-120"/>
-              </a:rPr>
-              <a:t>유도 질문</a:t>
-            </a:r>
-            <a:endParaRPr lang="en-US" sz="900" dirty="0"/>
-          </a:p>
-        </p:txBody>
-      </p:sp>
-      <p:sp>
-        <p:nvSpPr>
-          <p:cNvPr id="16" name="Text 14"/>
-          <p:cNvSpPr/>
-          <p:nvPr/>
-        </p:nvSpPr>
-        <p:spPr>
-          <a:xfrm>
-            <a:off x="6699352" y="2688336"/>
-            <a:ext cx="4449928" cy="384048"/>
-          </a:xfrm>
-          <a:prstGeom prst="rect">
-            <a:avLst/>
-          </a:prstGeom>
-          <a:noFill/>
-          <a:ln/>
-        </p:spPr>
-        <p:txBody>
-          <a:bodyPr wrap="square" lIns="0" tIns="0" rIns="0" bIns="0" rtlCol="0" anchor="t"/>
-          <a:lstStyle/>
-          <a:p>
-            <a:pPr indent="0" marL="0">
-              <a:lnSpc>
-                <a:spcPct val="120000"/>
-              </a:lnSpc>
-              <a:buNone/>
-            </a:pPr>
-            <a:r>
-              <a:rPr lang="en-US" sz="1150" dirty="0">
-                <a:solidFill>
-                  <a:srgbClr val="6E6E6E"/>
-                </a:solidFill>
-                <a:latin typeface="Pretendard" pitchFamily="34" charset="0"/>
-                <a:ea typeface="Pretendard" pitchFamily="34" charset="-122"/>
-                <a:cs typeface="Pretendard" pitchFamily="34" charset="-120"/>
-              </a:rPr>
-              <a:t>"이 서비스 불편하지 않으세요?" — 답을 미리 정해두고 물으면 상대는 동의해 줍니다</a:t>
-            </a:r>
-            <a:endParaRPr lang="en-US" sz="1150" dirty="0"/>
-          </a:p>
-        </p:txBody>
-      </p:sp>
-      <p:sp>
-        <p:nvSpPr>
-          <p:cNvPr id="17" name="Shape 15"/>
-          <p:cNvSpPr/>
-          <p:nvPr/>
-        </p:nvSpPr>
-        <p:spPr>
-          <a:xfrm>
-            <a:off x="1042416" y="3054096"/>
+          <p:cNvPr id="19" name="Shape 17"/>
+          <p:cNvSpPr/>
+          <p:nvPr/>
+        </p:nvSpPr>
+        <p:spPr>
+          <a:xfrm>
+            <a:off x="6699352" y="3054096"/>
             <a:ext cx="4449928" cy="7315"/>
           </a:xfrm>
           <a:prstGeom prst="rect">
@@ -17679,13 +17729,175 @@
       </p:sp>
       <p:sp>
         <p:nvSpPr>
-          <p:cNvPr id="18" name="Shape 16"/>
-          <p:cNvSpPr/>
-          <p:nvPr/>
-        </p:nvSpPr>
-        <p:spPr>
-          <a:xfrm>
-            <a:off x="6699352" y="3054096"/>
+          <p:cNvPr id="20" name="Text 18"/>
+          <p:cNvSpPr/>
+          <p:nvPr/>
+        </p:nvSpPr>
+        <p:spPr>
+          <a:xfrm>
+            <a:off x="1042416" y="3108960"/>
+            <a:ext cx="2011680" cy="274320"/>
+          </a:xfrm>
+          <a:prstGeom prst="rect">
+            <a:avLst/>
+          </a:prstGeom>
+          <a:noFill/>
+          <a:ln/>
+        </p:spPr>
+        <p:txBody>
+          <a:bodyPr wrap="square" lIns="0" tIns="0" rIns="0" bIns="0" rtlCol="0" anchor="ctr"/>
+          <a:lstStyle/>
+          <a:p>
+            <a:pPr indent="0" marL="0">
+              <a:buNone/>
+            </a:pPr>
+            <a:r>
+              <a:rPr lang="en-US" sz="900" b="1" spc="160" kern="0" dirty="0">
+                <a:solidFill>
+                  <a:srgbClr val="9B9B9B"/>
+                </a:solidFill>
+                <a:latin typeface="Pretendard" pitchFamily="34" charset="0"/>
+                <a:ea typeface="Pretendard" pitchFamily="34" charset="-122"/>
+                <a:cs typeface="Pretendard" pitchFamily="34" charset="-120"/>
+              </a:rPr>
+              <a:t>이중 질문</a:t>
+            </a:r>
+            <a:endParaRPr lang="en-US" sz="900" dirty="0"/>
+          </a:p>
+        </p:txBody>
+      </p:sp>
+      <p:sp>
+        <p:nvSpPr>
+          <p:cNvPr id="21" name="Text 19"/>
+          <p:cNvSpPr/>
+          <p:nvPr/>
+        </p:nvSpPr>
+        <p:spPr>
+          <a:xfrm>
+            <a:off x="1042416" y="3346704"/>
+            <a:ext cx="4449928" cy="384048"/>
+          </a:xfrm>
+          <a:prstGeom prst="rect">
+            <a:avLst/>
+          </a:prstGeom>
+          <a:noFill/>
+          <a:ln/>
+        </p:spPr>
+        <p:txBody>
+          <a:bodyPr wrap="square" lIns="0" tIns="0" rIns="0" bIns="0" rtlCol="0" anchor="t"/>
+          <a:lstStyle/>
+          <a:p>
+            <a:pPr indent="0" marL="0">
+              <a:lnSpc>
+                <a:spcPct val="120000"/>
+              </a:lnSpc>
+              <a:buNone/>
+            </a:pPr>
+            <a:r>
+              <a:rPr lang="en-US" sz="1150" dirty="0">
+                <a:solidFill>
+                  <a:srgbClr val="6E6E6E"/>
+                </a:solidFill>
+                <a:latin typeface="Pretendard" pitchFamily="34" charset="0"/>
+                <a:ea typeface="Pretendard" pitchFamily="34" charset="-122"/>
+                <a:cs typeface="Pretendard" pitchFamily="34" charset="-120"/>
+              </a:rPr>
+              <a:t>"최근 일주일에 몇 번 쓰셨어요? / 그때 어떠셨어요?" — 사실과 평가를 두 번에 나눠 묻습니다</a:t>
+            </a:r>
+            <a:endParaRPr lang="en-US" sz="1150" dirty="0"/>
+          </a:p>
+        </p:txBody>
+      </p:sp>
+      <p:sp>
+        <p:nvSpPr>
+          <p:cNvPr id="22" name="Text 20"/>
+          <p:cNvSpPr/>
+          <p:nvPr/>
+        </p:nvSpPr>
+        <p:spPr>
+          <a:xfrm>
+            <a:off x="6699352" y="3108960"/>
+            <a:ext cx="2011680" cy="274320"/>
+          </a:xfrm>
+          <a:prstGeom prst="rect">
+            <a:avLst/>
+          </a:prstGeom>
+          <a:noFill/>
+          <a:ln/>
+        </p:spPr>
+        <p:txBody>
+          <a:bodyPr wrap="square" lIns="0" tIns="0" rIns="0" bIns="0" rtlCol="0" anchor="ctr"/>
+          <a:lstStyle/>
+          <a:p>
+            <a:pPr indent="0" marL="0">
+              <a:buNone/>
+            </a:pPr>
+            <a:r>
+              <a:rPr lang="en-US" sz="900" b="1" spc="160" kern="0" dirty="0">
+                <a:solidFill>
+                  <a:srgbClr val="111111"/>
+                </a:solidFill>
+                <a:latin typeface="Pretendard" pitchFamily="34" charset="0"/>
+                <a:ea typeface="Pretendard" pitchFamily="34" charset="-122"/>
+                <a:cs typeface="Pretendard" pitchFamily="34" charset="-120"/>
+              </a:rPr>
+              <a:t>이중 질문</a:t>
+            </a:r>
+            <a:endParaRPr lang="en-US" sz="900" dirty="0"/>
+          </a:p>
+        </p:txBody>
+      </p:sp>
+      <p:sp>
+        <p:nvSpPr>
+          <p:cNvPr id="23" name="Text 21"/>
+          <p:cNvSpPr/>
+          <p:nvPr/>
+        </p:nvSpPr>
+        <p:spPr>
+          <a:xfrm>
+            <a:off x="6699352" y="3346704"/>
+            <a:ext cx="4449928" cy="384048"/>
+          </a:xfrm>
+          <a:prstGeom prst="rect">
+            <a:avLst/>
+          </a:prstGeom>
+          <a:noFill/>
+          <a:ln/>
+        </p:spPr>
+        <p:txBody>
+          <a:bodyPr wrap="square" lIns="0" tIns="0" rIns="0" bIns="0" rtlCol="0" anchor="t"/>
+          <a:lstStyle/>
+          <a:p>
+            <a:pPr indent="0" marL="0">
+              <a:lnSpc>
+                <a:spcPct val="120000"/>
+              </a:lnSpc>
+              <a:buNone/>
+            </a:pPr>
+            <a:r>
+              <a:rPr lang="en-US" sz="1150" b="1" dirty="0">
+                <a:solidFill>
+                  <a:srgbClr val="1F1F1F"/>
+                </a:solidFill>
+                <a:latin typeface="Pretendard" pitchFamily="34" charset="0"/>
+                <a:ea typeface="Pretendard" pitchFamily="34" charset="-122"/>
+                <a:cs typeface="Pretendard" pitchFamily="34" charset="-120"/>
+              </a:rPr>
+              <a:t>"앱을 자주 쓰시고 만족하시나요?" — 두 가지를 한 번에 물어 어느 쪽 답인지 알 수 없습니다</a:t>
+            </a:r>
+            <a:endParaRPr lang="en-US" sz="1150" dirty="0"/>
+          </a:p>
+        </p:txBody>
+      </p:sp>
+      <p:sp>
+        <p:nvSpPr>
+          <p:cNvPr id="24" name="Shape 22"/>
+          <p:cNvSpPr/>
+          <p:nvPr/>
+        </p:nvSpPr>
+        <p:spPr>
+          <a:xfrm>
+            <a:off x="1042416" y="3712464"/>
             <a:ext cx="4449928" cy="7315"/>
           </a:xfrm>
           <a:prstGeom prst="rect">
@@ -17704,175 +17916,13 @@
       </p:sp>
       <p:sp>
         <p:nvSpPr>
-          <p:cNvPr id="19" name="Text 17"/>
-          <p:cNvSpPr/>
-          <p:nvPr/>
-        </p:nvSpPr>
-        <p:spPr>
-          <a:xfrm>
-            <a:off x="1042416" y="3108960"/>
-            <a:ext cx="2011680" cy="274320"/>
-          </a:xfrm>
-          <a:prstGeom prst="rect">
-            <a:avLst/>
-          </a:prstGeom>
-          <a:noFill/>
-          <a:ln/>
-        </p:spPr>
-        <p:txBody>
-          <a:bodyPr wrap="square" lIns="0" tIns="0" rIns="0" bIns="0" rtlCol="0" anchor="ctr"/>
-          <a:lstStyle/>
-          <a:p>
-            <a:pPr indent="0" marL="0">
-              <a:buNone/>
-            </a:pPr>
-            <a:r>
-              <a:rPr lang="en-US" sz="900" b="1" spc="160" kern="0" dirty="0">
-                <a:solidFill>
-                  <a:srgbClr val="111111"/>
-                </a:solidFill>
-                <a:latin typeface="Pretendard" pitchFamily="34" charset="0"/>
-                <a:ea typeface="Pretendard" pitchFamily="34" charset="-122"/>
-                <a:cs typeface="Pretendard" pitchFamily="34" charset="-120"/>
-              </a:rPr>
-              <a:t>이중 질문</a:t>
-            </a:r>
-            <a:endParaRPr lang="en-US" sz="900" dirty="0"/>
-          </a:p>
-        </p:txBody>
-      </p:sp>
-      <p:sp>
-        <p:nvSpPr>
-          <p:cNvPr id="20" name="Text 18"/>
-          <p:cNvSpPr/>
-          <p:nvPr/>
-        </p:nvSpPr>
-        <p:spPr>
-          <a:xfrm>
-            <a:off x="1042416" y="3346704"/>
-            <a:ext cx="4449928" cy="384048"/>
-          </a:xfrm>
-          <a:prstGeom prst="rect">
-            <a:avLst/>
-          </a:prstGeom>
-          <a:noFill/>
-          <a:ln/>
-        </p:spPr>
-        <p:txBody>
-          <a:bodyPr wrap="square" lIns="0" tIns="0" rIns="0" bIns="0" rtlCol="0" anchor="t"/>
-          <a:lstStyle/>
-          <a:p>
-            <a:pPr indent="0" marL="0">
-              <a:lnSpc>
-                <a:spcPct val="120000"/>
-              </a:lnSpc>
-              <a:buNone/>
-            </a:pPr>
-            <a:r>
-              <a:rPr lang="en-US" sz="1150" dirty="0">
-                <a:solidFill>
-                  <a:srgbClr val="1F1F1F"/>
-                </a:solidFill>
-                <a:latin typeface="Pretendard" pitchFamily="34" charset="0"/>
-                <a:ea typeface="Pretendard" pitchFamily="34" charset="-122"/>
-                <a:cs typeface="Pretendard" pitchFamily="34" charset="-120"/>
-              </a:rPr>
-              <a:t>"최근 일주일에 몇 번 쓰셨어요? / 그때 어떠셨어요?" — 사실과 평가를 두 번에 나눠 묻습니다</a:t>
-            </a:r>
-            <a:endParaRPr lang="en-US" sz="1150" dirty="0"/>
-          </a:p>
-        </p:txBody>
-      </p:sp>
-      <p:sp>
-        <p:nvSpPr>
-          <p:cNvPr id="21" name="Text 19"/>
-          <p:cNvSpPr/>
-          <p:nvPr/>
-        </p:nvSpPr>
-        <p:spPr>
-          <a:xfrm>
-            <a:off x="6699352" y="3108960"/>
-            <a:ext cx="2011680" cy="274320"/>
-          </a:xfrm>
-          <a:prstGeom prst="rect">
-            <a:avLst/>
-          </a:prstGeom>
-          <a:noFill/>
-          <a:ln/>
-        </p:spPr>
-        <p:txBody>
-          <a:bodyPr wrap="square" lIns="0" tIns="0" rIns="0" bIns="0" rtlCol="0" anchor="ctr"/>
-          <a:lstStyle/>
-          <a:p>
-            <a:pPr indent="0" marL="0">
-              <a:buNone/>
-            </a:pPr>
-            <a:r>
-              <a:rPr lang="en-US" sz="900" b="1" spc="160" kern="0" dirty="0">
-                <a:solidFill>
-                  <a:srgbClr val="9B9B9B"/>
-                </a:solidFill>
-                <a:latin typeface="Pretendard" pitchFamily="34" charset="0"/>
-                <a:ea typeface="Pretendard" pitchFamily="34" charset="-122"/>
-                <a:cs typeface="Pretendard" pitchFamily="34" charset="-120"/>
-              </a:rPr>
-              <a:t>이중 질문</a:t>
-            </a:r>
-            <a:endParaRPr lang="en-US" sz="900" dirty="0"/>
-          </a:p>
-        </p:txBody>
-      </p:sp>
-      <p:sp>
-        <p:nvSpPr>
-          <p:cNvPr id="22" name="Text 20"/>
-          <p:cNvSpPr/>
-          <p:nvPr/>
-        </p:nvSpPr>
-        <p:spPr>
-          <a:xfrm>
-            <a:off x="6699352" y="3346704"/>
-            <a:ext cx="4449928" cy="384048"/>
-          </a:xfrm>
-          <a:prstGeom prst="rect">
-            <a:avLst/>
-          </a:prstGeom>
-          <a:noFill/>
-          <a:ln/>
-        </p:spPr>
-        <p:txBody>
-          <a:bodyPr wrap="square" lIns="0" tIns="0" rIns="0" bIns="0" rtlCol="0" anchor="t"/>
-          <a:lstStyle/>
-          <a:p>
-            <a:pPr indent="0" marL="0">
-              <a:lnSpc>
-                <a:spcPct val="120000"/>
-              </a:lnSpc>
-              <a:buNone/>
-            </a:pPr>
-            <a:r>
-              <a:rPr lang="en-US" sz="1150" dirty="0">
-                <a:solidFill>
-                  <a:srgbClr val="6E6E6E"/>
-                </a:solidFill>
-                <a:latin typeface="Pretendard" pitchFamily="34" charset="0"/>
-                <a:ea typeface="Pretendard" pitchFamily="34" charset="-122"/>
-                <a:cs typeface="Pretendard" pitchFamily="34" charset="-120"/>
-              </a:rPr>
-              <a:t>"앱을 자주 쓰시고 만족하시나요?" — 두 가지를 한 번에 물어 어느 쪽 답인지 알 수 없습니다</a:t>
-            </a:r>
-            <a:endParaRPr lang="en-US" sz="1150" dirty="0"/>
-          </a:p>
-        </p:txBody>
-      </p:sp>
-      <p:sp>
-        <p:nvSpPr>
-          <p:cNvPr id="23" name="Shape 21"/>
-          <p:cNvSpPr/>
-          <p:nvPr/>
-        </p:nvSpPr>
-        <p:spPr>
-          <a:xfrm>
-            <a:off x="1042416" y="3712464"/>
+          <p:cNvPr id="25" name="Shape 23"/>
+          <p:cNvSpPr/>
+          <p:nvPr/>
+        </p:nvSpPr>
+        <p:spPr>
+          <a:xfrm>
+            <a:off x="6699352" y="3712464"/>
             <a:ext cx="4449928" cy="7315"/>
           </a:xfrm>
           <a:prstGeom prst="rect">
@@ -17891,14 +17941,176 @@
       </p:sp>
       <p:sp>
         <p:nvSpPr>
-          <p:cNvPr id="24" name="Shape 22"/>
-          <p:cNvSpPr/>
-          <p:nvPr/>
-        </p:nvSpPr>
-        <p:spPr>
-          <a:xfrm>
-            <a:off x="6699352" y="3712464"/>
-            <a:ext cx="4449928" cy="7315"/>
+          <p:cNvPr id="26" name="Text 24"/>
+          <p:cNvSpPr/>
+          <p:nvPr/>
+        </p:nvSpPr>
+        <p:spPr>
+          <a:xfrm>
+            <a:off x="1042416" y="3767328"/>
+            <a:ext cx="2011680" cy="274320"/>
+          </a:xfrm>
+          <a:prstGeom prst="rect">
+            <a:avLst/>
+          </a:prstGeom>
+          <a:noFill/>
+          <a:ln/>
+        </p:spPr>
+        <p:txBody>
+          <a:bodyPr wrap="square" lIns="0" tIns="0" rIns="0" bIns="0" rtlCol="0" anchor="ctr"/>
+          <a:lstStyle/>
+          <a:p>
+            <a:pPr indent="0" marL="0">
+              <a:buNone/>
+            </a:pPr>
+            <a:r>
+              <a:rPr lang="en-US" sz="900" b="1" spc="160" kern="0" dirty="0">
+                <a:solidFill>
+                  <a:srgbClr val="9B9B9B"/>
+                </a:solidFill>
+                <a:latin typeface="Pretendard" pitchFamily="34" charset="0"/>
+                <a:ea typeface="Pretendard" pitchFamily="34" charset="-122"/>
+                <a:cs typeface="Pretendard" pitchFamily="34" charset="-120"/>
+              </a:rPr>
+              <a:t>가정 질문</a:t>
+            </a:r>
+            <a:endParaRPr lang="en-US" sz="900" dirty="0"/>
+          </a:p>
+        </p:txBody>
+      </p:sp>
+      <p:sp>
+        <p:nvSpPr>
+          <p:cNvPr id="27" name="Text 25"/>
+          <p:cNvSpPr/>
+          <p:nvPr/>
+        </p:nvSpPr>
+        <p:spPr>
+          <a:xfrm>
+            <a:off x="1042416" y="4005072"/>
+            <a:ext cx="4449928" cy="384048"/>
+          </a:xfrm>
+          <a:prstGeom prst="rect">
+            <a:avLst/>
+          </a:prstGeom>
+          <a:noFill/>
+          <a:ln/>
+        </p:spPr>
+        <p:txBody>
+          <a:bodyPr wrap="square" lIns="0" tIns="0" rIns="0" bIns="0" rtlCol="0" anchor="t"/>
+          <a:lstStyle/>
+          <a:p>
+            <a:pPr indent="0" marL="0">
+              <a:lnSpc>
+                <a:spcPct val="120000"/>
+              </a:lnSpc>
+              <a:buNone/>
+            </a:pPr>
+            <a:r>
+              <a:rPr lang="en-US" sz="1150" dirty="0">
+                <a:solidFill>
+                  <a:srgbClr val="6E6E6E"/>
+                </a:solidFill>
+                <a:latin typeface="Pretendard" pitchFamily="34" charset="0"/>
+                <a:ea typeface="Pretendard" pitchFamily="34" charset="-122"/>
+                <a:cs typeface="Pretendard" pitchFamily="34" charset="-120"/>
+              </a:rPr>
+              <a:t>"가장 최근에 하셨을 때는 어떻게 하셨어요?" — 특정 사건을 요청하면 실제 행동이 나옵니다</a:t>
+            </a:r>
+            <a:endParaRPr lang="en-US" sz="1150" dirty="0"/>
+          </a:p>
+        </p:txBody>
+      </p:sp>
+      <p:sp>
+        <p:nvSpPr>
+          <p:cNvPr id="28" name="Text 26"/>
+          <p:cNvSpPr/>
+          <p:nvPr/>
+        </p:nvSpPr>
+        <p:spPr>
+          <a:xfrm>
+            <a:off x="6699352" y="3767328"/>
+            <a:ext cx="2011680" cy="274320"/>
+          </a:xfrm>
+          <a:prstGeom prst="rect">
+            <a:avLst/>
+          </a:prstGeom>
+          <a:noFill/>
+          <a:ln/>
+        </p:spPr>
+        <p:txBody>
+          <a:bodyPr wrap="square" lIns="0" tIns="0" rIns="0" bIns="0" rtlCol="0" anchor="ctr"/>
+          <a:lstStyle/>
+          <a:p>
+            <a:pPr indent="0" marL="0">
+              <a:buNone/>
+            </a:pPr>
+            <a:r>
+              <a:rPr lang="en-US" sz="900" b="1" spc="160" kern="0" dirty="0">
+                <a:solidFill>
+                  <a:srgbClr val="111111"/>
+                </a:solidFill>
+                <a:latin typeface="Pretendard" pitchFamily="34" charset="0"/>
+                <a:ea typeface="Pretendard" pitchFamily="34" charset="-122"/>
+                <a:cs typeface="Pretendard" pitchFamily="34" charset="-120"/>
+              </a:rPr>
+              <a:t>가정 질문</a:t>
+            </a:r>
+            <a:endParaRPr lang="en-US" sz="900" dirty="0"/>
+          </a:p>
+        </p:txBody>
+      </p:sp>
+      <p:sp>
+        <p:nvSpPr>
+          <p:cNvPr id="29" name="Text 27"/>
+          <p:cNvSpPr/>
+          <p:nvPr/>
+        </p:nvSpPr>
+        <p:spPr>
+          <a:xfrm>
+            <a:off x="6699352" y="4005072"/>
+            <a:ext cx="4449928" cy="384048"/>
+          </a:xfrm>
+          <a:prstGeom prst="rect">
+            <a:avLst/>
+          </a:prstGeom>
+          <a:noFill/>
+          <a:ln/>
+        </p:spPr>
+        <p:txBody>
+          <a:bodyPr wrap="square" lIns="0" tIns="0" rIns="0" bIns="0" rtlCol="0" anchor="t"/>
+          <a:lstStyle/>
+          <a:p>
+            <a:pPr indent="0" marL="0">
+              <a:lnSpc>
+                <a:spcPct val="120000"/>
+              </a:lnSpc>
+              <a:buNone/>
+            </a:pPr>
+            <a:r>
+              <a:rPr lang="en-US" sz="1150" b="1" dirty="0">
+                <a:solidFill>
+                  <a:srgbClr val="1F1F1F"/>
+                </a:solidFill>
+                <a:latin typeface="Pretendard" pitchFamily="34" charset="0"/>
+                <a:ea typeface="Pretendard" pitchFamily="34" charset="-122"/>
+                <a:cs typeface="Pretendard" pitchFamily="34" charset="-120"/>
+              </a:rPr>
+              <a:t>"보통 어떻게 하세요?" — '보통'을 물으면 사실이 아니라 인상이 나옵니다</a:t>
+            </a:r>
+            <a:endParaRPr lang="en-US" sz="1150" dirty="0"/>
+          </a:p>
+        </p:txBody>
+      </p:sp>
+      <p:sp>
+        <p:nvSpPr>
+          <p:cNvPr id="30" name="Shape 28"/>
+          <p:cNvSpPr/>
+          <p:nvPr/>
+        </p:nvSpPr>
+        <p:spPr>
+          <a:xfrm>
+            <a:off x="640080" y="6291072"/>
+            <a:ext cx="10911535" cy="7315"/>
           </a:xfrm>
           <a:prstGeom prst="rect">
             <a:avLst/>
@@ -17916,194 +18128,7 @@
       </p:sp>
       <p:sp>
         <p:nvSpPr>
-          <p:cNvPr id="25" name="Text 23"/>
-          <p:cNvSpPr/>
-          <p:nvPr/>
-        </p:nvSpPr>
-        <p:spPr>
-          <a:xfrm>
-            <a:off x="1042416" y="3767328"/>
-            <a:ext cx="2011680" cy="274320"/>
-          </a:xfrm>
-          <a:prstGeom prst="rect">
-            <a:avLst/>
-          </a:prstGeom>
-          <a:noFill/>
-          <a:ln/>
-        </p:spPr>
-        <p:txBody>
-          <a:bodyPr wrap="square" lIns="0" tIns="0" rIns="0" bIns="0" rtlCol="0" anchor="ctr"/>
-          <a:lstStyle/>
-          <a:p>
-            <a:pPr indent="0" marL="0">
-              <a:buNone/>
-            </a:pPr>
-            <a:r>
-              <a:rPr lang="en-US" sz="900" b="1" spc="160" kern="0" dirty="0">
-                <a:solidFill>
-                  <a:srgbClr val="111111"/>
-                </a:solidFill>
-                <a:latin typeface="Pretendard" pitchFamily="34" charset="0"/>
-                <a:ea typeface="Pretendard" pitchFamily="34" charset="-122"/>
-                <a:cs typeface="Pretendard" pitchFamily="34" charset="-120"/>
-              </a:rPr>
-              <a:t>가정 질문</a:t>
-            </a:r>
-            <a:endParaRPr lang="en-US" sz="900" dirty="0"/>
-          </a:p>
-        </p:txBody>
-      </p:sp>
-      <p:sp>
-        <p:nvSpPr>
-          <p:cNvPr id="26" name="Text 24"/>
-          <p:cNvSpPr/>
-          <p:nvPr/>
-        </p:nvSpPr>
-        <p:spPr>
-          <a:xfrm>
-            <a:off x="1042416" y="4005072"/>
-            <a:ext cx="4449928" cy="384048"/>
-          </a:xfrm>
-          <a:prstGeom prst="rect">
-            <a:avLst/>
-          </a:prstGeom>
-          <a:noFill/>
-          <a:ln/>
-        </p:spPr>
-        <p:txBody>
-          <a:bodyPr wrap="square" lIns="0" tIns="0" rIns="0" bIns="0" rtlCol="0" anchor="t"/>
-          <a:lstStyle/>
-          <a:p>
-            <a:pPr indent="0" marL="0">
-              <a:lnSpc>
-                <a:spcPct val="120000"/>
-              </a:lnSpc>
-              <a:buNone/>
-            </a:pPr>
-            <a:r>
-              <a:rPr lang="en-US" sz="1150" dirty="0">
-                <a:solidFill>
-                  <a:srgbClr val="1F1F1F"/>
-                </a:solidFill>
-                <a:latin typeface="Pretendard" pitchFamily="34" charset="0"/>
-                <a:ea typeface="Pretendard" pitchFamily="34" charset="-122"/>
-                <a:cs typeface="Pretendard" pitchFamily="34" charset="-120"/>
-              </a:rPr>
-              <a:t>"가장 최근에 하셨을 때는 어떻게 하셨어요?" — 특정 사건을 요청하면 실제 행동이 나옵니다</a:t>
-            </a:r>
-            <a:endParaRPr lang="en-US" sz="1150" dirty="0"/>
-          </a:p>
-        </p:txBody>
-      </p:sp>
-      <p:sp>
-        <p:nvSpPr>
-          <p:cNvPr id="27" name="Text 25"/>
-          <p:cNvSpPr/>
-          <p:nvPr/>
-        </p:nvSpPr>
-        <p:spPr>
-          <a:xfrm>
-            <a:off x="6699352" y="3767328"/>
-            <a:ext cx="2011680" cy="274320"/>
-          </a:xfrm>
-          <a:prstGeom prst="rect">
-            <a:avLst/>
-          </a:prstGeom>
-          <a:noFill/>
-          <a:ln/>
-        </p:spPr>
-        <p:txBody>
-          <a:bodyPr wrap="square" lIns="0" tIns="0" rIns="0" bIns="0" rtlCol="0" anchor="ctr"/>
-          <a:lstStyle/>
-          <a:p>
-            <a:pPr indent="0" marL="0">
-              <a:buNone/>
-            </a:pPr>
-            <a:r>
-              <a:rPr lang="en-US" sz="900" b="1" spc="160" kern="0" dirty="0">
-                <a:solidFill>
-                  <a:srgbClr val="9B9B9B"/>
-                </a:solidFill>
-                <a:latin typeface="Pretendard" pitchFamily="34" charset="0"/>
-                <a:ea typeface="Pretendard" pitchFamily="34" charset="-122"/>
-                <a:cs typeface="Pretendard" pitchFamily="34" charset="-120"/>
-              </a:rPr>
-              <a:t>가정 질문</a:t>
-            </a:r>
-            <a:endParaRPr lang="en-US" sz="900" dirty="0"/>
-          </a:p>
-        </p:txBody>
-      </p:sp>
-      <p:sp>
-        <p:nvSpPr>
-          <p:cNvPr id="28" name="Text 26"/>
-          <p:cNvSpPr/>
-          <p:nvPr/>
-        </p:nvSpPr>
-        <p:spPr>
-          <a:xfrm>
-            <a:off x="6699352" y="4005072"/>
-            <a:ext cx="4449928" cy="384048"/>
-          </a:xfrm>
-          <a:prstGeom prst="rect">
-            <a:avLst/>
-          </a:prstGeom>
-          <a:noFill/>
-          <a:ln/>
-        </p:spPr>
-        <p:txBody>
-          <a:bodyPr wrap="square" lIns="0" tIns="0" rIns="0" bIns="0" rtlCol="0" anchor="t"/>
-          <a:lstStyle/>
-          <a:p>
-            <a:pPr indent="0" marL="0">
-              <a:lnSpc>
-                <a:spcPct val="120000"/>
-              </a:lnSpc>
-              <a:buNone/>
-            </a:pPr>
-            <a:r>
-              <a:rPr lang="en-US" sz="1150" dirty="0">
-                <a:solidFill>
-                  <a:srgbClr val="6E6E6E"/>
-                </a:solidFill>
-                <a:latin typeface="Pretendard" pitchFamily="34" charset="0"/>
-                <a:ea typeface="Pretendard" pitchFamily="34" charset="-122"/>
-                <a:cs typeface="Pretendard" pitchFamily="34" charset="-120"/>
-              </a:rPr>
-              <a:t>"보통 어떻게 하세요?" — '보통'을 물으면 사실이 아니라 인상이 나옵니다</a:t>
-            </a:r>
-            <a:endParaRPr lang="en-US" sz="1150" dirty="0"/>
-          </a:p>
-        </p:txBody>
-      </p:sp>
-      <p:sp>
-        <p:nvSpPr>
-          <p:cNvPr id="29" name="Shape 27"/>
-          <p:cNvSpPr/>
-          <p:nvPr/>
-        </p:nvSpPr>
-        <p:spPr>
-          <a:xfrm>
-            <a:off x="640080" y="6291072"/>
-            <a:ext cx="10911535" cy="7315"/>
-          </a:xfrm>
-          <a:prstGeom prst="rect">
-            <a:avLst/>
-          </a:prstGeom>
-          <a:solidFill>
-            <a:srgbClr val="DCDCDC"/>
-          </a:solidFill>
-          <a:ln w="12700">
-            <a:solidFill>
-              <a:srgbClr val="DCDCDC"/>
-            </a:solidFill>
-            <a:prstDash val="solid"/>
-          </a:ln>
-        </p:spPr>
-      </p:sp>
-      <p:sp>
-        <p:nvSpPr>
-          <p:cNvPr id="30" name="Text 28"/>
+          <p:cNvPr id="31" name="Text 29"/>
           <p:cNvSpPr/>
           <p:nvPr/>
         </p:nvSpPr>
@@ -18142,7 +18167,7 @@
       </p:sp>
       <p:sp>
         <p:nvSpPr>
-          <p:cNvPr id="31" name="Text 29"/>
+          <p:cNvPr id="32" name="Text 30"/>
           <p:cNvSpPr/>
           <p:nvPr/>
         </p:nvSpPr>
